--- a/Bloc_4_ATT_Spam_Detector/ATT_spam_detector_presentation.pptx
+++ b/Bloc_4_ATT_Spam_Detector/ATT_spam_detector_presentation.pptx
@@ -18255,23 +18255,7 @@
               <a:buNone/>
             </a:pPr>
             <a:r>
-              <a:t>• Accuracy globale : 97,1 %</a:t>
-            </a:r>
-            <a:br/>
-            <a:r>
-              <a:t>• Précision (Spam) : 99,2 % (1 seul faux positif sur 966 hams)</a:t>
-            </a:r>
-            <a:br/>
-            <a:r>
-              <a:t>• Rappel / Recall (Spam) : 79,2 % (31 spams non détectés sur 149)</a:t>
-            </a:r>
-            <a:br/>
-            <a:r>
-              <a:t>• F1-Score (Spam) : 0,881</a:t>
-            </a:r>
-            <a:br/>
-            <a:r>
-              <a:t>• ROC-AUC : 0,987</a:t>
+              <a:t>• Accuracy globale : 97,2 % • Précision (Spam) : 99,2 % (1 seul faux positif sur 966 hams) • Rappel / Recall (Spam) : 79,9 % (30 spams non détectés sur 149) • F1-Score (Spam) : 0,885 • ROC-AUC : 0,986</a:t>
             </a:r>
             <a:endParaRPr b="0" i="0" sz="1400" u="none" cap="none" strike="noStrike">
               <a:solidFill>
@@ -18302,7 +18286,7 @@
               <a:buNone/>
             </a:pPr>
             <a:r>
-              <a:t>Verdict Baseline : Précision quasi-parfaite (99,2 %), mais le rappel laisse s'échapper près de 21 % des spams malveillants (31 spams ratés). Un modèle séquentiel profond est indispensable.</a:t>
+              <a:t>Verdict Baseline : Précision quasi-parfaite (99,2 %), mais le rappel laisse s'échapper 20,1 % des spams malveillants (30 spams ratés sur 149). Un modèle séquentiel profond est indispensable.</a:t>
             </a:r>
             <a:endParaRPr b="0" i="0" sz="1400" u="none" cap="none" strike="noStrike">
               <a:solidFill>
@@ -21096,7 +21080,7 @@
                     <a:lstStyle/>
                     <a:p>
                       <a:r>
-                        <a:t>97,1 %</a:t>
+                        <a:t>97,2 %</a:t>
                       </a:r>
                     </a:p>
                   </a:txBody>
@@ -21349,7 +21333,7 @@
                     <a:lstStyle/>
                     <a:p>
                       <a:r>
-                        <a:t>79,2 %</a:t>
+                        <a:t>79,9 %</a:t>
                       </a:r>
                     </a:p>
                   </a:txBody>
@@ -21383,7 +21367,7 @@
                     <a:lstStyle/>
                     <a:p>
                       <a:r>
-                        <a:t>94,0 % (+14,8 pts)</a:t>
+                        <a:t>94,0 % (+14,1 pts)</a:t>
                       </a:r>
                     </a:p>
                   </a:txBody>
@@ -21486,7 +21470,7 @@
                     <a:lstStyle/>
                     <a:p>
                       <a:r>
-                        <a:t>0,881</a:t>
+                        <a:t>0,885</a:t>
                       </a:r>
                     </a:p>
                   </a:txBody>
@@ -21520,7 +21504,7 @@
                     <a:lstStyle/>
                     <a:p>
                       <a:r>
-                        <a:t>0,946 (+6,5 pts)</a:t>
+                        <a:t>0,946 (+0,061 pt)</a:t>
                       </a:r>
                     </a:p>
                   </a:txBody>
@@ -21614,7 +21598,7 @@
                     <a:lstStyle/>
                     <a:p>
                       <a:r>
-                        <a:t>0,987</a:t>
+                        <a:t>0,986</a:t>
                       </a:r>
                     </a:p>
                   </a:txBody>
@@ -21745,7 +21729,7 @@
                     <a:lstStyle/>
                     <a:p>
                       <a:r>
-                        <a:t>31</a:t>
+                        <a:t>30</a:t>
                       </a:r>
                     </a:p>
                   </a:txBody>
@@ -21779,7 +21763,7 @@
                     <a:lstStyle/>
                     <a:p>
                       <a:r>
-                        <a:t>9 (divisé par 3,4 !)</a:t>
+                        <a:t>9 (divisé par 3,3 !)</a:t>
                       </a:r>
                     </a:p>
                   </a:txBody>
@@ -22039,7 +22023,7 @@
               <a:buNone/>
             </a:pPr>
             <a:r>
-              <a:t>Le Bi-LSTM divise par plus de trois le volume de spams non interceptés (de 31 à seulement 9 spams manqués sur 149).</a:t>
+              <a:t>Le Bi-LSTM divise par plus de trois le volume de spams non interceptés (de 30 à seulement 9 spams manqués sur 149).</a:t>
             </a:r>
             <a:endParaRPr sz="1050">
               <a:solidFill>
@@ -22625,28 +22609,7 @@
               <a:buChar char="●"/>
             </a:pPr>
             <a:r>
-              <a:rPr b="1" lang="en-US" sz="1100">
-                <a:solidFill>
-                  <a:srgbClr val="0A2540"/>
-                </a:solidFill>
-                <a:latin typeface="Calibri"/>
-                <a:ea typeface="Calibri"/>
-                <a:cs typeface="Calibri"/>
-                <a:sym typeface="Calibri"/>
-              </a:rPr>
-              <a:t>Politique Défensive AT&amp;T (Seuil = 0,70) :</a:t>
-            </a:r>
-            <a:r>
-              <a:rPr b="0" lang="en-US" sz="1100">
-                <a:solidFill>
-                  <a:srgbClr val="334155"/>
-                </a:solidFill>
-                <a:latin typeface="Calibri"/>
-                <a:ea typeface="Calibri"/>
-                <a:cs typeface="Calibri"/>
-                <a:sym typeface="Calibri"/>
-              </a:rPr>
-              <a:t> Priorité absolue : 0 Faux Positif. Seuls les spams ultra-confiants sont bloqués. Taux d'interception = 90 %.</a:t>
+              <a:t>• Politique Équilibrée (Seuil = 0,67 - 0,70) : Optimum F1-score à 0,959. Capture 93,3 % des spams (139/149) avec seulement 2 faux positifs sur 966 hams.</a:t>
             </a:r>
             <a:endParaRPr b="0" sz="1100">
               <a:solidFill>
@@ -22674,28 +22637,7 @@
               <a:buChar char="●"/>
             </a:pPr>
             <a:r>
-              <a:rPr b="1" lang="en-US" sz="1100">
-                <a:solidFill>
-                  <a:srgbClr val="0A2540"/>
-                </a:solidFill>
-                <a:latin typeface="Calibri"/>
-                <a:ea typeface="Calibri"/>
-                <a:cs typeface="Calibri"/>
-                <a:sym typeface="Calibri"/>
-              </a:rPr>
-              <a:t>Politique Équilibrée (Seuil = 0,23 - 0,35) :</a:t>
-            </a:r>
-            <a:r>
-              <a:rPr b="0" lang="en-US" sz="1100">
-                <a:solidFill>
-                  <a:srgbClr val="334155"/>
-                </a:solidFill>
-                <a:latin typeface="Calibri"/>
-                <a:ea typeface="Calibri"/>
-                <a:cs typeface="Calibri"/>
-                <a:sym typeface="Calibri"/>
-              </a:rPr>
-              <a:t> Maximise le F1-score à 0,95. Capture 93,5 % des spams avec seulement 5 cas limites réorientés en quarantaine.</a:t>
+              <a:t>• Politique Défensive AT&amp;T (Seuil = 0,90) : Priorité absolue : 0 Faux Positif garanti (100 % précision). Seuls les spams formellement certifiés sont bloqués. Taux de capture = 91,3 %.</a:t>
             </a:r>
             <a:endParaRPr b="0" sz="1100">
               <a:solidFill>
@@ -22723,28 +22665,7 @@
               <a:buChar char="●"/>
             </a:pPr>
             <a:r>
-              <a:rPr b="1" lang="en-US" sz="1100">
-                <a:solidFill>
-                  <a:srgbClr val="0A2540"/>
-                </a:solidFill>
-                <a:latin typeface="Calibri"/>
-                <a:ea typeface="Calibri"/>
-                <a:cs typeface="Calibri"/>
-                <a:sym typeface="Calibri"/>
-              </a:rPr>
-              <a:t>En production :</a:t>
-            </a:r>
-            <a:r>
-              <a:rPr b="0" lang="en-US" sz="1100">
-                <a:solidFill>
-                  <a:srgbClr val="334155"/>
-                </a:solidFill>
-                <a:latin typeface="Calibri"/>
-                <a:ea typeface="Calibri"/>
-                <a:cs typeface="Calibri"/>
-                <a:sym typeface="Calibri"/>
-              </a:rPr>
-              <a:t> Mise en place d'un dossier 'Quarantaine / Courrier indésirable' pour les probabilités intermédiaires (0,30 à 0,70).</a:t>
+              <a:t>• En production (Architecture 3 zones) : P &lt; 0,30 : Boîte directe. 0,30 ≤ P &lt; 0,70 : Dossier Quarantaine / Indésirables. P ≥ 0,70 (ou 0,90) : Blocage réseau direct.</a:t>
             </a:r>
             <a:endParaRPr b="0" sz="1100">
               <a:solidFill>
